--- a/yunqi-2026-pai-forum/docs/洞察一页-01-从算力到智能体：Agentic Infrastructu.pptx
+++ b/yunqi-2026-pai-forum/docs/洞察一页-01-从算力到智能体：Agentic Infrastructu.pptx
@@ -3141,7 +3141,7 @@
         <p:spPr>
           <a:xfrm>
             <a:off x="0" y="0"/>
-            <a:ext cx="12191695" cy="1051560"/>
+            <a:ext cx="12191695" cy="1097280"/>
           </a:xfrm>
           <a:prstGeom prst="rect">
             <a:avLst/>
@@ -3183,8 +3183,8 @@
         </p:nvSpPr>
         <p:spPr>
           <a:xfrm>
-            <a:off x="365760" y="146304"/>
-            <a:ext cx="11430000" cy="274320"/>
+            <a:off x="320040" y="91440"/>
+            <a:ext cx="11521440" cy="237744"/>
           </a:xfrm>
           <a:prstGeom prst="rect">
             <a:avLst/>
@@ -3199,7 +3199,7 @@
           <a:p>
             <a:pPr algn="l"/>
             <a:r>
-              <a:rPr sz="1300" b="0">
+              <a:rPr sz="1200" b="0">
                 <a:solidFill>
                   <a:srgbClr val="6B6B6B"/>
                 </a:solidFill>
@@ -3219,8 +3219,8 @@
         </p:nvSpPr>
         <p:spPr>
           <a:xfrm>
-            <a:off x="365760" y="420624"/>
-            <a:ext cx="11430000" cy="502920"/>
+            <a:off x="320040" y="347472"/>
+            <a:ext cx="11521440" cy="658368"/>
           </a:xfrm>
           <a:prstGeom prst="rect">
             <a:avLst/>
@@ -3235,14 +3235,14 @@
           <a:p>
             <a:pPr algn="l"/>
             <a:r>
-              <a:rPr sz="2000" b="1">
+              <a:rPr sz="1600" b="1">
                 <a:solidFill>
                   <a:srgbClr val="1A1A1A"/>
                 </a:solidFill>
                 <a:latin typeface="Microsoft YaHei"/>
                 <a:ea typeface="Microsoft YaHei"/>
               </a:rPr>
-              <a:t>洞察：下一代 AI 基础设施应从「堆卡」转向算力/网络/存储/框架/服务精密协同，以会话级状态与 K…</a:t>
+              <a:t>洞察：下一代 AI 基础设施应从「堆卡」转向算力/网络/存储/框架/服务精密协同，以会话级状态与 KV 资产为核心。</a:t>
             </a:r>
           </a:p>
         </p:txBody>
@@ -3255,8 +3255,8 @@
         </p:nvSpPr>
         <p:spPr>
           <a:xfrm>
-            <a:off x="320040" y="1207008"/>
-            <a:ext cx="11521440" cy="502920"/>
+            <a:off x="274320" y="1207008"/>
+            <a:ext cx="11612880" cy="749808"/>
           </a:xfrm>
           <a:prstGeom prst="rect">
             <a:avLst/>
@@ -3300,8 +3300,8 @@
         </p:nvSpPr>
         <p:spPr>
           <a:xfrm>
-            <a:off x="457200" y="1298448"/>
-            <a:ext cx="11247120" cy="365760"/>
+            <a:off x="411480" y="1261872"/>
+            <a:ext cx="11338560" cy="640080"/>
           </a:xfrm>
           <a:prstGeom prst="rect">
             <a:avLst/>
@@ -3316,14 +3316,14 @@
           <a:p>
             <a:pPr algn="l"/>
             <a:r>
-              <a:rPr sz="1300" b="1">
+              <a:rPr sz="1200" b="1">
                 <a:solidFill>
                   <a:srgbClr val="1A1A1A"/>
                 </a:solidFill>
                 <a:latin typeface="Microsoft YaHei"/>
                 <a:ea typeface="Microsoft YaHei"/>
               </a:rPr>
-              <a:t>一句话判断：本演讲系统阐述 Agentic AI 如何重写 AI 基础设施：负载从问答变为全天自主 Agent，范式从预训练主导走向 Pre/Post/Test-time 并重并以 RL 定制模型，边界从数字世界延伸到物理世界。围…</a:t>
+              <a:t>一句话判断：本演讲系统阐述 Agentic AI 如何重写 AI 基础设施：负载从问答变为全天自主 Agent，范式从预训练主导走向 Pre/Post/Test-time 并重并以 RL 定制模型，边界从数字世界延伸到物理世界。</a:t>
             </a:r>
           </a:p>
         </p:txBody>
@@ -3336,8 +3336,8 @@
         </p:nvSpPr>
         <p:spPr>
           <a:xfrm>
-            <a:off x="320040" y="1874519"/>
-            <a:ext cx="3703320" cy="2606040"/>
+            <a:off x="274320" y="2084831"/>
+            <a:ext cx="3749039" cy="2267712"/>
           </a:xfrm>
           <a:prstGeom prst="rect">
             <a:avLst/>
@@ -3381,8 +3381,8 @@
         </p:nvSpPr>
         <p:spPr>
           <a:xfrm>
-            <a:off x="457200" y="2011679"/>
-            <a:ext cx="3429000" cy="320040"/>
+            <a:off x="402336" y="2176271"/>
+            <a:ext cx="3493007" cy="292608"/>
           </a:xfrm>
           <a:prstGeom prst="rect">
             <a:avLst/>
@@ -3397,14 +3397,14 @@
           <a:p>
             <a:pPr algn="l"/>
             <a:r>
-              <a:rPr sz="1500" b="1">
+              <a:rPr sz="1400" b="1">
                 <a:solidFill>
                   <a:srgbClr val="8B1A2B"/>
                 </a:solidFill>
                 <a:latin typeface="Microsoft YaHei"/>
                 <a:ea typeface="Microsoft YaHei"/>
               </a:rPr>
-              <a:t>01  Agentic AI 三重变化…</a:t>
+              <a:t>01  负载、范式、边界</a:t>
             </a:r>
           </a:p>
         </p:txBody>
@@ -3417,8 +3417,8 @@
         </p:nvSpPr>
         <p:spPr>
           <a:xfrm>
-            <a:off x="484632" y="2377439"/>
-            <a:ext cx="3374136" cy="1965960"/>
+            <a:off x="402336" y="2487167"/>
+            <a:ext cx="3493007" cy="1764792"/>
           </a:xfrm>
           <a:prstGeom prst="rect">
             <a:avLst/>
@@ -3433,45 +3433,62 @@
           <a:p>
             <a:pPr algn="l">
               <a:spcAft>
-                <a:spcPts val="400"/>
+                <a:spcPts val="200"/>
               </a:spcAft>
             </a:pPr>
             <a:r>
-              <a:rPr sz="1200" b="1">
+              <a:rPr sz="1100" b="1">
                 <a:solidFill>
                   <a:srgbClr val="1A1A1A"/>
                 </a:solidFill>
                 <a:latin typeface="Microsoft YaHei"/>
                 <a:ea typeface="Microsoft YaHei"/>
               </a:rPr>
-              <a:t>负载：单次会话变成长跑，Agent 推理调用量达人类数百倍，长上下文与多轮工具调用…</a:t>
+              <a:t>友商需把「会话级状态与 KV 资产」纳入推理网关设计，并补齐 Rollout/Env/Reward 多角色训练编排，而不是只堆单卡吞吐。</a:t>
             </a:r>
           </a:p>
           <a:p>
             <a:pPr algn="l">
               <a:spcAft>
-                <a:spcPts val="400"/>
+                <a:spcPts val="200"/>
               </a:spcAft>
             </a:pPr>
             <a:r>
-              <a:rPr sz="1200" b="0">
+              <a:rPr sz="1100" b="0">
                 <a:solidFill>
                   <a:srgbClr val="4A4A4A"/>
                 </a:solidFill>
                 <a:latin typeface="Microsoft YaHei"/>
                 <a:ea typeface="Microsoft YaHei"/>
               </a:rPr>
-              <a:t>• 范式：从预训练主导转向 Pre-training / Post-training / Test-time 三阶段并重，RL 成为模型定…</a:t>
+              <a:t>• 负载：单次会话变成长跑，Agent 推理调用量达人类数百倍，长上下文与多轮工具调用成常态</a:t>
             </a:r>
           </a:p>
           <a:p>
             <a:pPr algn="l">
               <a:spcAft>
-                <a:spcPts val="400"/>
+                <a:spcPts val="200"/>
               </a:spcAft>
             </a:pPr>
             <a:r>
-              <a:rPr sz="1200" b="0">
+              <a:rPr sz="1100" b="0">
+                <a:solidFill>
+                  <a:srgbClr val="4A4A4A"/>
+                </a:solidFill>
+                <a:latin typeface="Microsoft YaHei"/>
+                <a:ea typeface="Microsoft YaHei"/>
+              </a:rPr>
+              <a:t>• 范式：从预训练主导转向 Pre-training / Post-training / Test-time 三阶段并重，RL 成为模型定制主路径</a:t>
+            </a:r>
+          </a:p>
+          <a:p>
+            <a:pPr algn="l">
+              <a:spcAft>
+                <a:spcPts val="200"/>
+              </a:spcAft>
+            </a:pPr>
+            <a:r>
+              <a:rPr sz="1100" b="0">
                 <a:solidFill>
                   <a:srgbClr val="4A4A4A"/>
                 </a:solidFill>
@@ -3491,8 +3508,8 @@
         </p:nvSpPr>
         <p:spPr>
           <a:xfrm>
-            <a:off x="4224528" y="1874519"/>
-            <a:ext cx="3703320" cy="2606040"/>
+            <a:off x="4187951" y="2084831"/>
+            <a:ext cx="3749039" cy="2267712"/>
           </a:xfrm>
           <a:prstGeom prst="rect">
             <a:avLst/>
@@ -3536,8 +3553,8 @@
         </p:nvSpPr>
         <p:spPr>
           <a:xfrm>
-            <a:off x="4361688" y="2011679"/>
-            <a:ext cx="3429000" cy="320040"/>
+            <a:off x="4315967" y="2176271"/>
+            <a:ext cx="3493007" cy="292608"/>
           </a:xfrm>
           <a:prstGeom prst="rect">
             <a:avLst/>
@@ -3552,14 +3569,14 @@
           <a:p>
             <a:pPr algn="l"/>
             <a:r>
-              <a:rPr sz="1500" b="1">
+              <a:rPr sz="1400" b="1">
                 <a:solidFill>
                   <a:srgbClr val="8B1A2B"/>
                 </a:solidFill>
                 <a:latin typeface="Microsoft YaHei"/>
                 <a:ea typeface="Microsoft YaHei"/>
               </a:rPr>
-              <a:t>02  AI 基础设施四维升级：算力买…</a:t>
+              <a:t>02  算力买得到 ≠ 用得好</a:t>
             </a:r>
           </a:p>
         </p:txBody>
@@ -3572,8 +3589,8 @@
         </p:nvSpPr>
         <p:spPr>
           <a:xfrm>
-            <a:off x="4389120" y="2377439"/>
-            <a:ext cx="3374136" cy="1965960"/>
+            <a:off x="4315967" y="2487167"/>
+            <a:ext cx="3493007" cy="1764792"/>
           </a:xfrm>
           <a:prstGeom prst="rect">
             <a:avLst/>
@@ -3588,28 +3605,45 @@
           <a:p>
             <a:pPr algn="l">
               <a:spcAft>
-                <a:spcPts val="400"/>
+                <a:spcPts val="200"/>
               </a:spcAft>
             </a:pPr>
             <a:r>
-              <a:rPr sz="1200" b="1">
+              <a:rPr sz="1100" b="1">
                 <a:solidFill>
                   <a:srgbClr val="1A1A1A"/>
                 </a:solidFill>
                 <a:latin typeface="Microsoft YaHei"/>
                 <a:ea typeface="Microsoft YaHei"/>
               </a:rPr>
-              <a:t>算力：从单卡单机堆叠 → 超节点 64 卡域内互联 + 多级拓扑万卡亲和</a:t>
+              <a:t>平台竞争力应从「卡时售卖」转向算力-网络-存储-框架-服务的精密系统工程</a:t>
             </a:r>
           </a:p>
           <a:p>
             <a:pPr algn="l">
               <a:spcAft>
-                <a:spcPts val="400"/>
+                <a:spcPts val="200"/>
               </a:spcAft>
             </a:pPr>
             <a:r>
-              <a:rPr sz="1200" b="0">
+              <a:rPr sz="1100" b="0">
+                <a:solidFill>
+                  <a:srgbClr val="4A4A4A"/>
+                </a:solidFill>
+                <a:latin typeface="Microsoft YaHei"/>
+                <a:ea typeface="Microsoft YaHei"/>
+              </a:rPr>
+              <a:t>• 算力：从单卡单机堆叠 → 超节点 64 卡域内互联 + 多级拓扑万卡亲和</a:t>
+            </a:r>
+          </a:p>
+          <a:p>
+            <a:pPr algn="l">
+              <a:spcAft>
+                <a:spcPts val="200"/>
+              </a:spcAft>
+            </a:pPr>
+            <a:r>
+              <a:rPr sz="1100" b="0">
                 <a:solidFill>
                   <a:srgbClr val="4A4A4A"/>
                 </a:solidFill>
@@ -3622,11 +3656,11 @@
           <a:p>
             <a:pPr algn="l">
               <a:spcAft>
-                <a:spcPts val="400"/>
+                <a:spcPts val="200"/>
               </a:spcAft>
             </a:pPr>
             <a:r>
-              <a:rPr sz="1200" b="0">
+              <a:rPr sz="1100" b="0">
                 <a:solidFill>
                   <a:srgbClr val="4A4A4A"/>
                 </a:solidFill>
@@ -3636,23 +3670,6 @@
               <a:t>• 运行时：从单一训练任务调度 → Rollout/Train/Eval/Env 解耦与异步协同</a:t>
             </a:r>
           </a:p>
-          <a:p>
-            <a:pPr algn="l">
-              <a:spcAft>
-                <a:spcPts val="400"/>
-              </a:spcAft>
-            </a:pPr>
-            <a:r>
-              <a:rPr sz="1200" b="0">
-                <a:solidFill>
-                  <a:srgbClr val="4A4A4A"/>
-                </a:solidFill>
-                <a:latin typeface="Microsoft YaHei"/>
-                <a:ea typeface="Microsoft YaHei"/>
-              </a:rPr>
-              <a:t>• 服务：从无状态网关 + QPS → 有状态记忆中枢（KV Cache 复用 + 会话级 SLO）</a:t>
-            </a:r>
-          </a:p>
         </p:txBody>
       </p:sp>
       <p:sp>
@@ -3663,8 +3680,8 @@
         </p:nvSpPr>
         <p:spPr>
           <a:xfrm>
-            <a:off x="8129016" y="1874519"/>
-            <a:ext cx="3703320" cy="2606040"/>
+            <a:off x="8101582" y="2084831"/>
+            <a:ext cx="3749039" cy="2267712"/>
           </a:xfrm>
           <a:prstGeom prst="rect">
             <a:avLst/>
@@ -3708,8 +3725,8 @@
         </p:nvSpPr>
         <p:spPr>
           <a:xfrm>
-            <a:off x="8266176" y="2011679"/>
-            <a:ext cx="3429000" cy="320040"/>
+            <a:off x="8229598" y="2176271"/>
+            <a:ext cx="3493007" cy="292608"/>
           </a:xfrm>
           <a:prstGeom prst="rect">
             <a:avLst/>
@@ -3724,14 +3741,14 @@
           <a:p>
             <a:pPr algn="l"/>
             <a:r>
-              <a:rPr sz="1500" b="1">
+              <a:rPr sz="1400" b="1">
                 <a:solidFill>
                   <a:srgbClr val="8B1A2B"/>
                 </a:solidFill>
                 <a:latin typeface="Microsoft YaHei"/>
                 <a:ea typeface="Microsoft YaHei"/>
               </a:rPr>
-              <a:t>03  PAI-DLC 3.0：万卡训…</a:t>
+              <a:t>03  万卡训练精密系统工程</a:t>
             </a:r>
           </a:p>
         </p:txBody>
@@ -3744,8 +3761,8 @@
         </p:nvSpPr>
         <p:spPr>
           <a:xfrm>
-            <a:off x="8293608" y="2377439"/>
-            <a:ext cx="3374136" cy="1965960"/>
+            <a:off x="8229598" y="2487167"/>
+            <a:ext cx="3493007" cy="1764792"/>
           </a:xfrm>
           <a:prstGeom prst="rect">
             <a:avLst/>
@@ -3760,28 +3777,45 @@
           <a:p>
             <a:pPr algn="l">
               <a:spcAft>
-                <a:spcPts val="400"/>
+                <a:spcPts val="200"/>
               </a:spcAft>
             </a:pPr>
             <a:r>
-              <a:rPr sz="1200" b="1">
+              <a:rPr sz="1100" b="1">
                 <a:solidFill>
                   <a:srgbClr val="1A1A1A"/>
                 </a:solidFill>
                 <a:latin typeface="Microsoft YaHei"/>
                 <a:ea typeface="Microsoft YaHei"/>
               </a:rPr>
-              <a:t>算力与网络：原生 64 卡超节点，HPN8.0/CIPU2.0，多级拓扑万卡互联、…</a:t>
+              <a:t>训练平台应产品化「读缓存+RDMA+P2P」数据供给与无侵入加速层，并用 Agent 化诊断降低万卡故障定位成本。</a:t>
             </a:r>
           </a:p>
           <a:p>
             <a:pPr algn="l">
               <a:spcAft>
-                <a:spcPts val="400"/>
+                <a:spcPts val="200"/>
               </a:spcAft>
             </a:pPr>
             <a:r>
-              <a:rPr sz="1200" b="0">
+              <a:rPr sz="1100" b="0">
+                <a:solidFill>
+                  <a:srgbClr val="4A4A4A"/>
+                </a:solidFill>
+                <a:latin typeface="Microsoft YaHei"/>
+                <a:ea typeface="Microsoft YaHei"/>
+              </a:rPr>
+              <a:t>• 算力与网络：原生 64 卡超节点，HPN8.0/CIPU2.0，多级拓扑万卡互联、亲和组调度、超节点可观测与大规模容错</a:t>
+            </a:r>
+          </a:p>
+          <a:p>
+            <a:pPr algn="l">
+              <a:spcAft>
+                <a:spcPts val="200"/>
+              </a:spcAft>
+            </a:pPr>
+            <a:r>
+              <a:rPr sz="1100" b="0">
                 <a:solidFill>
                   <a:srgbClr val="4A4A4A"/>
                 </a:solidFill>
@@ -3794,11 +3828,11 @@
           <a:p>
             <a:pPr algn="l">
               <a:spcAft>
-                <a:spcPts val="400"/>
+                <a:spcPts val="200"/>
               </a:spcAft>
             </a:pPr>
             <a:r>
-              <a:rPr sz="1200" b="0">
+              <a:rPr sz="1100" b="0">
                 <a:solidFill>
                   <a:srgbClr val="4A4A4A"/>
                 </a:solidFill>
@@ -3808,23 +3842,6 @@
               <a:t>• 训练加速 TurboX：全栈加速引擎，免改代码释放算力/通信/数据全链路性能</a:t>
             </a:r>
           </a:p>
-          <a:p>
-            <a:pPr algn="l">
-              <a:spcAft>
-                <a:spcPts val="400"/>
-              </a:spcAft>
-            </a:pPr>
-            <a:r>
-              <a:rPr sz="1200" b="0">
-                <a:solidFill>
-                  <a:srgbClr val="4A4A4A"/>
-                </a:solidFill>
-                <a:latin typeface="Microsoft YaHei"/>
-                <a:ea typeface="Microsoft YaHei"/>
-              </a:rPr>
-              <a:t>• 智能诊断 Xfuse：基础设施+框架+任务三层洞察，结合基模经验与 Agent 能力自动定位根因</a:t>
-            </a:r>
-          </a:p>
         </p:txBody>
       </p:sp>
       <p:sp>
@@ -3835,8 +3852,8 @@
         </p:nvSpPr>
         <p:spPr>
           <a:xfrm>
-            <a:off x="320040" y="4617720"/>
-            <a:ext cx="7315200" cy="256032"/>
+            <a:off x="274320" y="4553712"/>
+            <a:ext cx="7315200" cy="237744"/>
           </a:xfrm>
           <a:prstGeom prst="rect">
             <a:avLst/>
@@ -3851,7 +3868,7 @@
           <a:p>
             <a:pPr algn="l"/>
             <a:r>
-              <a:rPr sz="1400" b="1">
+              <a:rPr sz="1300" b="1">
                 <a:solidFill>
                   <a:srgbClr val="1A1A1A"/>
                 </a:solidFill>
@@ -3871,8 +3888,8 @@
         </p:nvSpPr>
         <p:spPr>
           <a:xfrm>
-            <a:off x="320040" y="4910328"/>
-            <a:ext cx="1847088" cy="868680"/>
+            <a:off x="274320" y="4809744"/>
+            <a:ext cx="1874519" cy="960120"/>
           </a:xfrm>
           <a:prstGeom prst="rect">
             <a:avLst/>
@@ -3916,8 +3933,8 @@
         </p:nvSpPr>
         <p:spPr>
           <a:xfrm>
-            <a:off x="429768" y="4965192"/>
-            <a:ext cx="1664208" cy="201168"/>
+            <a:off x="365760" y="4864608"/>
+            <a:ext cx="1709927" cy="201168"/>
           </a:xfrm>
           <a:prstGeom prst="rect">
             <a:avLst/>
@@ -3939,7 +3956,7 @@
                 <a:latin typeface="Microsoft YaHei"/>
                 <a:ea typeface="Microsoft YaHei"/>
               </a:rPr>
-              <a:t>Agentic AI …</a:t>
+              <a:t>负载、范式、边界</a:t>
             </a:r>
           </a:p>
         </p:txBody>
@@ -3952,8 +3969,8 @@
         </p:nvSpPr>
         <p:spPr>
           <a:xfrm>
-            <a:off x="429768" y="5166360"/>
-            <a:ext cx="1664208" cy="237744"/>
+            <a:off x="365760" y="5065776"/>
+            <a:ext cx="1709927" cy="256032"/>
           </a:xfrm>
           <a:prstGeom prst="rect">
             <a:avLst/>
@@ -3975,7 +3992,7 @@
                 <a:latin typeface="Microsoft YaHei"/>
                 <a:ea typeface="Microsoft YaHei"/>
               </a:rPr>
-              <a:t>负载：单次会话变成长跑，Age…</a:t>
+              <a:t>演讲口径</a:t>
             </a:r>
           </a:p>
         </p:txBody>
@@ -3988,8 +4005,8 @@
         </p:nvSpPr>
         <p:spPr>
           <a:xfrm>
-            <a:off x="429768" y="5413248"/>
-            <a:ext cx="1664208" cy="292608"/>
+            <a:off x="365760" y="5340096"/>
+            <a:ext cx="1709927" cy="365760"/>
           </a:xfrm>
           <a:prstGeom prst="rect">
             <a:avLst/>
@@ -4004,7 +4021,7 @@
           <a:p>
             <a:pPr algn="l"/>
             <a:r>
-              <a:rPr sz="1400" b="1">
+              <a:rPr sz="1200" b="1">
                 <a:solidFill>
                   <a:srgbClr val="8B1A2B"/>
                 </a:solidFill>
@@ -4024,8 +4041,8 @@
         </p:nvSpPr>
         <p:spPr>
           <a:xfrm>
-            <a:off x="2276856" y="4910328"/>
-            <a:ext cx="1847088" cy="868680"/>
+            <a:off x="2240279" y="4809744"/>
+            <a:ext cx="1874519" cy="960120"/>
           </a:xfrm>
           <a:prstGeom prst="rect">
             <a:avLst/>
@@ -4069,8 +4086,8 @@
         </p:nvSpPr>
         <p:spPr>
           <a:xfrm>
-            <a:off x="2386584" y="4965192"/>
-            <a:ext cx="1664208" cy="201168"/>
+            <a:off x="2331719" y="4864608"/>
+            <a:ext cx="1709927" cy="201168"/>
           </a:xfrm>
           <a:prstGeom prst="rect">
             <a:avLst/>
@@ -4092,7 +4109,7 @@
                 <a:latin typeface="Microsoft YaHei"/>
                 <a:ea typeface="Microsoft YaHei"/>
               </a:rPr>
-              <a:t>AI 基础设施四维升级…</a:t>
+              <a:t>算力买得到 ≠ 用得好</a:t>
             </a:r>
           </a:p>
         </p:txBody>
@@ -4105,8 +4122,8 @@
         </p:nvSpPr>
         <p:spPr>
           <a:xfrm>
-            <a:off x="2386584" y="5166360"/>
-            <a:ext cx="1664208" cy="237744"/>
+            <a:off x="2331719" y="5065776"/>
+            <a:ext cx="1709927" cy="256032"/>
           </a:xfrm>
           <a:prstGeom prst="rect">
             <a:avLst/>
@@ -4128,7 +4145,7 @@
                 <a:latin typeface="Microsoft YaHei"/>
                 <a:ea typeface="Microsoft YaHei"/>
               </a:rPr>
-              <a:t>万卡多级拓扑亲和</a:t>
+              <a:t>演讲口径</a:t>
             </a:r>
           </a:p>
         </p:txBody>
@@ -4141,8 +4158,8 @@
         </p:nvSpPr>
         <p:spPr>
           <a:xfrm>
-            <a:off x="2386584" y="5413248"/>
-            <a:ext cx="1664208" cy="292608"/>
+            <a:off x="2331719" y="5340096"/>
+            <a:ext cx="1709927" cy="365760"/>
           </a:xfrm>
           <a:prstGeom prst="rect">
             <a:avLst/>
@@ -4157,7 +4174,7 @@
           <a:p>
             <a:pPr algn="l"/>
             <a:r>
-              <a:rPr sz="1400" b="1">
+              <a:rPr sz="1200" b="1">
                 <a:solidFill>
                   <a:srgbClr val="8B1A2B"/>
                 </a:solidFill>
@@ -4177,8 +4194,8 @@
         </p:nvSpPr>
         <p:spPr>
           <a:xfrm>
-            <a:off x="4233672" y="4910328"/>
-            <a:ext cx="1847088" cy="868680"/>
+            <a:off x="4206238" y="4809744"/>
+            <a:ext cx="1874519" cy="960120"/>
           </a:xfrm>
           <a:prstGeom prst="rect">
             <a:avLst/>
@@ -4222,8 +4239,8 @@
         </p:nvSpPr>
         <p:spPr>
           <a:xfrm>
-            <a:off x="4343400" y="4965192"/>
-            <a:ext cx="1664208" cy="201168"/>
+            <a:off x="4297678" y="4864608"/>
+            <a:ext cx="1709927" cy="201168"/>
           </a:xfrm>
           <a:prstGeom prst="rect">
             <a:avLst/>
@@ -4245,7 +4262,7 @@
                 <a:latin typeface="Microsoft YaHei"/>
                 <a:ea typeface="Microsoft YaHei"/>
               </a:rPr>
-              <a:t>PAI-DLC 3.0…</a:t>
+              <a:t>算力买得到 ≠ 用得好·2</a:t>
             </a:r>
           </a:p>
         </p:txBody>
@@ -4258,8 +4275,8 @@
         </p:nvSpPr>
         <p:spPr>
           <a:xfrm>
-            <a:off x="4343400" y="5166360"/>
-            <a:ext cx="1664208" cy="237744"/>
+            <a:off x="4297678" y="5065776"/>
+            <a:ext cx="1709927" cy="256032"/>
           </a:xfrm>
           <a:prstGeom prst="rect">
             <a:avLst/>
@@ -4281,7 +4298,7 @@
                 <a:latin typeface="Microsoft YaHei"/>
                 <a:ea typeface="Microsoft YaHei"/>
               </a:rPr>
-              <a:t>预热缓存加速 3x</a:t>
+              <a:t>演讲口径</a:t>
             </a:r>
           </a:p>
         </p:txBody>
@@ -4294,8 +4311,8 @@
         </p:nvSpPr>
         <p:spPr>
           <a:xfrm>
-            <a:off x="4343400" y="5413248"/>
-            <a:ext cx="1664208" cy="292608"/>
+            <a:off x="4297678" y="5340096"/>
+            <a:ext cx="1709927" cy="365760"/>
           </a:xfrm>
           <a:prstGeom prst="rect">
             <a:avLst/>
@@ -4310,14 +4327,14 @@
           <a:p>
             <a:pPr algn="l"/>
             <a:r>
-              <a:rPr sz="1400" b="1">
+              <a:rPr sz="1200" b="1">
                 <a:solidFill>
                   <a:srgbClr val="8B1A2B"/>
                 </a:solidFill>
                 <a:latin typeface="Microsoft YaHei"/>
                 <a:ea typeface="Microsoft YaHei"/>
               </a:rPr>
-              <a:t>64 卡原生超节点</a:t>
+              <a:t>万卡多级拓扑亲和</a:t>
             </a:r>
           </a:p>
         </p:txBody>
@@ -4330,8 +4347,8 @@
         </p:nvSpPr>
         <p:spPr>
           <a:xfrm>
-            <a:off x="6190488" y="4910328"/>
-            <a:ext cx="1847088" cy="868680"/>
+            <a:off x="6172197" y="4809744"/>
+            <a:ext cx="1874519" cy="960120"/>
           </a:xfrm>
           <a:prstGeom prst="rect">
             <a:avLst/>
@@ -4375,8 +4392,8 @@
         </p:nvSpPr>
         <p:spPr>
           <a:xfrm>
-            <a:off x="6300216" y="4965192"/>
-            <a:ext cx="1664208" cy="201168"/>
+            <a:off x="6263637" y="4864608"/>
+            <a:ext cx="1709927" cy="201168"/>
           </a:xfrm>
           <a:prstGeom prst="rect">
             <a:avLst/>
@@ -4398,7 +4415,7 @@
                 <a:latin typeface="Microsoft YaHei"/>
                 <a:ea typeface="Microsoft YaHei"/>
               </a:rPr>
-              <a:t>PAI-InferX：…</a:t>
+              <a:t>万卡训练精密系统工程</a:t>
             </a:r>
           </a:p>
         </p:txBody>
@@ -4411,8 +4428,8 @@
         </p:nvSpPr>
         <p:spPr>
           <a:xfrm>
-            <a:off x="6300216" y="5166360"/>
-            <a:ext cx="1664208" cy="237744"/>
+            <a:off x="6263637" y="5065776"/>
+            <a:ext cx="1709927" cy="256032"/>
           </a:xfrm>
           <a:prstGeom prst="rect">
             <a:avLst/>
@@ -4434,7 +4451,7 @@
                 <a:latin typeface="Microsoft YaHei"/>
                 <a:ea typeface="Microsoft YaHei"/>
               </a:rPr>
-              <a:t>TTFT 下降约 40%（30…</a:t>
+              <a:t>演讲口径</a:t>
             </a:r>
           </a:p>
         </p:txBody>
@@ -4447,8 +4464,8 @@
         </p:nvSpPr>
         <p:spPr>
           <a:xfrm>
-            <a:off x="6300216" y="5413248"/>
-            <a:ext cx="1664208" cy="292608"/>
+            <a:off x="6263637" y="5340096"/>
+            <a:ext cx="1709927" cy="365760"/>
           </a:xfrm>
           <a:prstGeom prst="rect">
             <a:avLst/>
@@ -4463,14 +4480,14 @@
           <a:p>
             <a:pPr algn="l"/>
             <a:r>
-              <a:rPr sz="1400" b="1">
+              <a:rPr sz="1200" b="1">
                 <a:solidFill>
                   <a:srgbClr val="8B1A2B"/>
                 </a:solidFill>
                 <a:latin typeface="Microsoft YaHei"/>
                 <a:ea typeface="Microsoft YaHei"/>
               </a:rPr>
-              <a:t>吞吐提升约 55%（30%~80%）</a:t>
+              <a:t>64 卡原生超节点</a:t>
             </a:r>
           </a:p>
         </p:txBody>
@@ -4483,8 +4500,8 @@
         </p:nvSpPr>
         <p:spPr>
           <a:xfrm>
-            <a:off x="8147304" y="4910328"/>
-            <a:ext cx="1847088" cy="868680"/>
+            <a:off x="8138156" y="4809744"/>
+            <a:ext cx="1874519" cy="960120"/>
           </a:xfrm>
           <a:prstGeom prst="rect">
             <a:avLst/>
@@ -4528,8 +4545,8 @@
         </p:nvSpPr>
         <p:spPr>
           <a:xfrm>
-            <a:off x="8257032" y="4965192"/>
-            <a:ext cx="1664208" cy="201168"/>
+            <a:off x="8229596" y="4864608"/>
+            <a:ext cx="1709927" cy="201168"/>
           </a:xfrm>
           <a:prstGeom prst="rect">
             <a:avLst/>
@@ -4551,7 +4568,7 @@
                 <a:latin typeface="Microsoft YaHei"/>
                 <a:ea typeface="Microsoft YaHei"/>
               </a:rPr>
-              <a:t>物理 AI 三件套：E…</a:t>
+              <a:t>万卡训练精密系统工程·2</a:t>
             </a:r>
           </a:p>
         </p:txBody>
@@ -4564,8 +4581,8 @@
         </p:nvSpPr>
         <p:spPr>
           <a:xfrm>
-            <a:off x="8257032" y="5166360"/>
-            <a:ext cx="1664208" cy="237744"/>
+            <a:off x="8229596" y="5065776"/>
+            <a:ext cx="1709927" cy="256032"/>
           </a:xfrm>
           <a:prstGeom prst="rect">
             <a:avLst/>
@@ -4587,7 +4604,7 @@
                 <a:latin typeface="Microsoft YaHei"/>
                 <a:ea typeface="Microsoft YaHei"/>
               </a:rPr>
-              <a:t>数据墙→PAI-EgoX：第一…</a:t>
+              <a:t>演讲口径</a:t>
             </a:r>
           </a:p>
         </p:txBody>
@@ -4600,8 +4617,8 @@
         </p:nvSpPr>
         <p:spPr>
           <a:xfrm>
-            <a:off x="8257032" y="5413248"/>
-            <a:ext cx="1664208" cy="292608"/>
+            <a:off x="8229596" y="5340096"/>
+            <a:ext cx="1709927" cy="365760"/>
           </a:xfrm>
           <a:prstGeom prst="rect">
             <a:avLst/>
@@ -4616,14 +4633,14 @@
           <a:p>
             <a:pPr algn="l"/>
             <a:r>
-              <a:rPr sz="1400" b="1">
+              <a:rPr sz="1200" b="1">
                 <a:solidFill>
                   <a:srgbClr val="8B1A2B"/>
                 </a:solidFill>
                 <a:latin typeface="Microsoft YaHei"/>
                 <a:ea typeface="Microsoft YaHei"/>
               </a:rPr>
-              <a:t>多场景并行仿真评测中部分任务成功率…</a:t>
+              <a:t>预热缓存加速 3x</a:t>
             </a:r>
           </a:p>
         </p:txBody>
@@ -4636,8 +4653,8 @@
         </p:nvSpPr>
         <p:spPr>
           <a:xfrm>
-            <a:off x="10104120" y="4910328"/>
-            <a:ext cx="1847088" cy="868680"/>
+            <a:off x="10104115" y="4809744"/>
+            <a:ext cx="1874519" cy="960120"/>
           </a:xfrm>
           <a:prstGeom prst="rect">
             <a:avLst/>
@@ -4681,8 +4698,8 @@
         </p:nvSpPr>
         <p:spPr>
           <a:xfrm>
-            <a:off x="10213848" y="4965192"/>
-            <a:ext cx="1664208" cy="201168"/>
+            <a:off x="10195555" y="4864608"/>
+            <a:ext cx="1709927" cy="201168"/>
           </a:xfrm>
           <a:prstGeom prst="rect">
             <a:avLst/>
@@ -4704,7 +4721,7 @@
                 <a:latin typeface="Microsoft YaHei"/>
                 <a:ea typeface="Microsoft YaHei"/>
               </a:rPr>
-              <a:t>PAI-Crystal…</a:t>
+              <a:t>万卡训练精密系统工程·3</a:t>
             </a:r>
           </a:p>
         </p:txBody>
@@ -4717,8 +4734,8 @@
         </p:nvSpPr>
         <p:spPr>
           <a:xfrm>
-            <a:off x="10213848" y="5166360"/>
-            <a:ext cx="1664208" cy="237744"/>
+            <a:off x="10195555" y="5065776"/>
+            <a:ext cx="1709927" cy="256032"/>
           </a:xfrm>
           <a:prstGeom prst="rect">
             <a:avLst/>
@@ -4740,7 +4757,7 @@
                 <a:latin typeface="Microsoft YaHei"/>
                 <a:ea typeface="Microsoft YaHei"/>
               </a:rPr>
-              <a:t>峰值显存误差 &lt;0.01% 且…</a:t>
+              <a:t>演讲口径</a:t>
             </a:r>
           </a:p>
         </p:txBody>
@@ -4753,8 +4770,8 @@
         </p:nvSpPr>
         <p:spPr>
           <a:xfrm>
-            <a:off x="10213848" y="5413248"/>
-            <a:ext cx="1664208" cy="292608"/>
+            <a:off x="10195555" y="5340096"/>
+            <a:ext cx="1709927" cy="365760"/>
           </a:xfrm>
           <a:prstGeom prst="rect">
             <a:avLst/>
@@ -4769,14 +4786,14 @@
           <a:p>
             <a:pPr algn="l"/>
             <a:r>
-              <a:rPr sz="1400" b="1">
+              <a:rPr sz="1200" b="1">
                 <a:solidFill>
                   <a:srgbClr val="8B1A2B"/>
                 </a:solidFill>
                 <a:latin typeface="Microsoft YaHei"/>
                 <a:ea typeface="Microsoft YaHei"/>
               </a:rPr>
-              <a:t>资源节省约 97%</a:t>
+              <a:t>远程数据加载加速 15%~35%</a:t>
             </a:r>
           </a:p>
         </p:txBody>
@@ -4789,8 +4806,8 @@
         </p:nvSpPr>
         <p:spPr>
           <a:xfrm>
-            <a:off x="0" y="5989320"/>
-            <a:ext cx="12191695" cy="868680"/>
+            <a:off x="0" y="5870448"/>
+            <a:ext cx="12191695" cy="987552"/>
           </a:xfrm>
           <a:prstGeom prst="rect">
             <a:avLst/>
@@ -4832,8 +4849,8 @@
         </p:nvSpPr>
         <p:spPr>
           <a:xfrm>
-            <a:off x="365760" y="6080760"/>
-            <a:ext cx="11430000" cy="256032"/>
+            <a:off x="320040" y="5943600"/>
+            <a:ext cx="11521440" cy="502920"/>
           </a:xfrm>
           <a:prstGeom prst="rect">
             <a:avLst/>
@@ -4848,14 +4865,14 @@
           <a:p>
             <a:pPr algn="l"/>
             <a:r>
-              <a:rPr sz="1200" b="1">
+              <a:rPr sz="1100" b="1">
                 <a:solidFill>
                   <a:srgbClr val="1A1A1A"/>
                 </a:solidFill>
                 <a:latin typeface="Microsoft YaHei"/>
                 <a:ea typeface="Microsoft YaHei"/>
               </a:rPr>
-              <a:t>可落地动作：下一代 AI 基础设施应从「堆卡」转向算力/网络/存储/框架/服务精密协同，以会话级状态与 KV 资产为核心。；训练侧需产品化超节点亲和、确定性数据供给、无侵入加速与万卡仿真试错；推理侧需 Session 亲和与分布式 KV。</a:t>
+              <a:t>可落地动作：下一代 AI 基础设施应从「堆卡」转向算力/网络/存储/框架/服务精密协同，以会话级状态与 KV 资产为核心；训练侧需产品化超节点亲和、确定性数据供给、无侵入加速与万卡仿真试错；推理侧需 Session 亲和与分布式 KV；物理 AI 与持续进化（CrystalLLM + PAI-RLS）标志着平台边界从数字世界延伸到具身与 RL 闭环，友商应补齐数据产线与多角色 RL 编排。</a:t>
             </a:r>
           </a:p>
         </p:txBody>
@@ -4868,8 +4885,8 @@
         </p:nvSpPr>
         <p:spPr>
           <a:xfrm>
-            <a:off x="365760" y="6373368"/>
-            <a:ext cx="11430000" cy="256032"/>
+            <a:off x="320040" y="6437376"/>
+            <a:ext cx="11521440" cy="256032"/>
           </a:xfrm>
           <a:prstGeom prst="rect">
             <a:avLst/>
@@ -4884,7 +4901,7 @@
           <a:p>
             <a:pPr algn="l"/>
             <a:r>
-              <a:rPr sz="1000" b="0">
+              <a:rPr sz="900" b="0">
                 <a:solidFill>
                   <a:srgbClr val="6B6B6B"/>
                 </a:solidFill>
@@ -5126,7 +5143,7 @@
         <p:spPr>
           <a:xfrm>
             <a:off x="429768" y="1143000"/>
-            <a:ext cx="3496970" cy="292608"/>
+            <a:ext cx="3496970" cy="384048"/>
           </a:xfrm>
           <a:prstGeom prst="rect">
             <a:avLst/>
@@ -5169,7 +5186,7 @@
         </p:blipFill>
         <p:spPr>
           <a:xfrm>
-            <a:off x="429768" y="1928092"/>
+            <a:off x="429768" y="1946380"/>
             <a:ext cx="3496970" cy="2965239"/>
           </a:xfrm>
           <a:prstGeom prst="rect">
@@ -5267,7 +5284,7 @@
         <p:spPr>
           <a:xfrm>
             <a:off x="4347362" y="1143000"/>
-            <a:ext cx="3496970" cy="292608"/>
+            <a:ext cx="3496970" cy="384048"/>
           </a:xfrm>
           <a:prstGeom prst="rect">
             <a:avLst/>
@@ -5289,7 +5306,7 @@
                 <a:latin typeface="Microsoft YaHei"/>
                 <a:ea typeface="Microsoft YaHei"/>
               </a:rPr>
-              <a:t>64 卡超节点域内互联</a:t>
+              <a:t>64 卡超节点域内互联 · 万卡多级拓扑亲和</a:t>
             </a:r>
           </a:p>
         </p:txBody>
@@ -5310,7 +5327,7 @@
         </p:blipFill>
         <p:spPr>
           <a:xfrm>
-            <a:off x="4347362" y="1928092"/>
+            <a:off x="4347362" y="1946380"/>
             <a:ext cx="3496970" cy="2965239"/>
           </a:xfrm>
           <a:prstGeom prst="rect">
@@ -5408,7 +5425,7 @@
         <p:spPr>
           <a:xfrm>
             <a:off x="8264956" y="1143000"/>
-            <a:ext cx="3496970" cy="292608"/>
+            <a:ext cx="3496970" cy="384048"/>
           </a:xfrm>
           <a:prstGeom prst="rect">
             <a:avLst/>
@@ -5430,7 +5447,7 @@
                 <a:latin typeface="Microsoft YaHei"/>
                 <a:ea typeface="Microsoft YaHei"/>
               </a:rPr>
-              <a:t>64 卡原生超节点</a:t>
+              <a:t>64 卡原生超节点 · 预热缓存加速 3x</a:t>
             </a:r>
           </a:p>
         </p:txBody>
@@ -5451,7 +5468,7 @@
         </p:blipFill>
         <p:spPr>
           <a:xfrm>
-            <a:off x="8264956" y="1928092"/>
+            <a:off x="8264956" y="1946380"/>
             <a:ext cx="3496970" cy="2965239"/>
           </a:xfrm>
           <a:prstGeom prst="rect">

--- a/yunqi-2026-pai-forum/docs/洞察一页-01-从算力到智能体：Agentic Infrastructu.pptx
+++ b/yunqi-2026-pai-forum/docs/洞察一页-01-从算力到智能体：Agentic Infrastructu.pptx
@@ -3323,7 +3323,7 @@
                 <a:latin typeface="Microsoft YaHei"/>
                 <a:ea typeface="Microsoft YaHei"/>
               </a:rPr>
-              <a:t>一句话判断：本演讲系统阐述 Agentic AI 如何重写 AI 基础设施：负载从问答变为全天自主 Agent，范式从预训练主导走向 Pre/Post/Test-time 并重并以 RL 定制模型，边界从数字世界延伸到物理世界。</a:t>
+              <a:t>一句话判断：阿里云 PAI-DLC / PAI-InferX——重写 AI 基础设施：负载从问答变为全天自主 Agent，范式从预训练主导走向 Pre/Post/Test-time 并重并以 RL 定制模型，边界从数字世界延伸到物理世界。</a:t>
             </a:r>
           </a:p>
         </p:txBody>
@@ -3444,7 +3444,7 @@
                 <a:latin typeface="Microsoft YaHei"/>
                 <a:ea typeface="Microsoft YaHei"/>
               </a:rPr>
-              <a:t>友商需把「会话级状态与 KV 资产」纳入推理网关设计，并补齐 Rollout/Env/Reward 多角色训练编排，而不是只堆单卡吞吐。</a:t>
+              <a:t>需要把「会话级状态与 KV 资产」纳入推理网关设计，并补齐 Rollout/Env/Reward 多角色训练编排，而不是只堆单卡吞吐。</a:t>
             </a:r>
           </a:p>
           <a:p>
@@ -3956,7 +3956,7 @@
                 <a:latin typeface="Microsoft YaHei"/>
                 <a:ea typeface="Microsoft YaHei"/>
               </a:rPr>
-              <a:t>负载、范式、边界</a:t>
+              <a:t>预热缓存加速</a:t>
             </a:r>
           </a:p>
         </p:txBody>
@@ -3992,7 +3992,7 @@
                 <a:latin typeface="Microsoft YaHei"/>
                 <a:ea typeface="Microsoft YaHei"/>
               </a:rPr>
-              <a:t>演讲口径</a:t>
+              <a:t>万卡训练精密系统工程</a:t>
             </a:r>
           </a:p>
         </p:txBody>
@@ -4028,7 +4028,7 @@
                 <a:latin typeface="Microsoft YaHei"/>
                 <a:ea typeface="Microsoft YaHei"/>
               </a:rPr>
-              <a:t>Agent 推理调用量约为人类数百倍</a:t>
+              <a:t>3x</a:t>
             </a:r>
           </a:p>
         </p:txBody>
@@ -4109,7 +4109,7 @@
                 <a:latin typeface="Microsoft YaHei"/>
                 <a:ea typeface="Microsoft YaHei"/>
               </a:rPr>
-              <a:t>算力买得到 ≠ 用得好</a:t>
+              <a:t>资源节省</a:t>
             </a:r>
           </a:p>
         </p:txBody>
@@ -4145,7 +4145,7 @@
                 <a:latin typeface="Microsoft YaHei"/>
                 <a:ea typeface="Microsoft YaHei"/>
               </a:rPr>
-              <a:t>演讲口径</a:t>
+              <a:t>低成本仿真万卡训练试错场</a:t>
             </a:r>
           </a:p>
         </p:txBody>
@@ -4181,7 +4181,7 @@
                 <a:latin typeface="Microsoft YaHei"/>
                 <a:ea typeface="Microsoft YaHei"/>
               </a:rPr>
-              <a:t>64 卡超节点域内互联</a:t>
+              <a:t>约 97%</a:t>
             </a:r>
           </a:p>
         </p:txBody>
@@ -4262,7 +4262,7 @@
                 <a:latin typeface="Microsoft YaHei"/>
                 <a:ea typeface="Microsoft YaHei"/>
               </a:rPr>
-              <a:t>算力买得到 ≠ 用得好·2</a:t>
+              <a:t>模型吞吐提升</a:t>
             </a:r>
           </a:p>
         </p:txBody>
@@ -4298,7 +4298,7 @@
                 <a:latin typeface="Microsoft YaHei"/>
                 <a:ea typeface="Microsoft YaHei"/>
               </a:rPr>
-              <a:t>演讲口径</a:t>
+              <a:t>万卡训练精密系统工程</a:t>
             </a:r>
           </a:p>
         </p:txBody>
@@ -4334,7 +4334,7 @@
                 <a:latin typeface="Microsoft YaHei"/>
                 <a:ea typeface="Microsoft YaHei"/>
               </a:rPr>
-              <a:t>万卡多级拓扑亲和</a:t>
+              <a:t>3.24x</a:t>
             </a:r>
           </a:p>
         </p:txBody>
@@ -4415,7 +4415,7 @@
                 <a:latin typeface="Microsoft YaHei"/>
                 <a:ea typeface="Microsoft YaHei"/>
               </a:rPr>
-              <a:t>万卡训练精密系统工程</a:t>
+              <a:t>MFU 绝对提升</a:t>
             </a:r>
           </a:p>
         </p:txBody>
@@ -4451,7 +4451,7 @@
                 <a:latin typeface="Microsoft YaHei"/>
                 <a:ea typeface="Microsoft YaHei"/>
               </a:rPr>
-              <a:t>演讲口径</a:t>
+              <a:t>低成本仿真万卡训练试错场</a:t>
             </a:r>
           </a:p>
         </p:txBody>
@@ -4487,7 +4487,7 @@
                 <a:latin typeface="Microsoft YaHei"/>
                 <a:ea typeface="Microsoft YaHei"/>
               </a:rPr>
-              <a:t>64 卡原生超节点</a:t>
+              <a:t>+2~10%</a:t>
             </a:r>
           </a:p>
         </p:txBody>
@@ -4568,7 +4568,7 @@
                 <a:latin typeface="Microsoft YaHei"/>
                 <a:ea typeface="Microsoft YaHei"/>
               </a:rPr>
-              <a:t>万卡训练精密系统工程·2</a:t>
+              <a:t>远程数据加载加速</a:t>
             </a:r>
           </a:p>
         </p:txBody>
@@ -4604,7 +4604,7 @@
                 <a:latin typeface="Microsoft YaHei"/>
                 <a:ea typeface="Microsoft YaHei"/>
               </a:rPr>
-              <a:t>演讲口径</a:t>
+              <a:t>万卡训练精密系统工程</a:t>
             </a:r>
           </a:p>
         </p:txBody>
@@ -4640,7 +4640,7 @@
                 <a:latin typeface="Microsoft YaHei"/>
                 <a:ea typeface="Microsoft YaHei"/>
               </a:rPr>
-              <a:t>预热缓存加速 3x</a:t>
+              <a:t>15%~35%</a:t>
             </a:r>
           </a:p>
         </p:txBody>
@@ -4721,7 +4721,7 @@
                 <a:latin typeface="Microsoft YaHei"/>
                 <a:ea typeface="Microsoft YaHei"/>
               </a:rPr>
-              <a:t>万卡训练精密系统工程·3</a:t>
+              <a:t>智驾模型端到端加速</a:t>
             </a:r>
           </a:p>
         </p:txBody>
@@ -4757,7 +4757,7 @@
                 <a:latin typeface="Microsoft YaHei"/>
                 <a:ea typeface="Microsoft YaHei"/>
               </a:rPr>
-              <a:t>演讲口径</a:t>
+              <a:t>万卡训练精密系统工程</a:t>
             </a:r>
           </a:p>
         </p:txBody>
@@ -4793,7 +4793,7 @@
                 <a:latin typeface="Microsoft YaHei"/>
                 <a:ea typeface="Microsoft YaHei"/>
               </a:rPr>
-              <a:t>远程数据加载加速 15%~35%</a:t>
+              <a:t>2~2.4x</a:t>
             </a:r>
           </a:p>
         </p:txBody>
@@ -4872,7 +4872,7 @@
                 <a:latin typeface="Microsoft YaHei"/>
                 <a:ea typeface="Microsoft YaHei"/>
               </a:rPr>
-              <a:t>可落地动作：下一代 AI 基础设施应从「堆卡」转向算力/网络/存储/框架/服务精密协同，以会话级状态与 KV 资产为核心；训练侧需产品化超节点亲和、确定性数据供给、无侵入加速与万卡仿真试错；推理侧需 Session 亲和与分布式 KV；物理 AI 与持续进化（CrystalLLM + PAI-RLS）标志着平台边界从数字世界延伸到具身与 RL 闭环，友商应补齐数据产线与多角色 RL 编排。</a:t>
+              <a:t>启示要点：下一代 AI 基础设施应从「堆卡」转向算力/网络/存储/框架/服务精密协同，以会话级状态与 KV 资产为核心；训练侧需产品化超节点亲和、确定性数据供给、无侵入加速与万卡仿真试错；推理侧需 Session 亲和与分布式 KV；物理 AI 与持续进化（CrystalLLM + PAI-RLS）标志着平台边界从数字世界延伸到具身与 RL 闭环。</a:t>
             </a:r>
           </a:p>
         </p:txBody>
